--- a/20263600김준성.pptx
+++ b/20263600김준성.pptx
@@ -13,6 +13,10 @@
     <p:sldId id="261" r:id="rId7"/>
     <p:sldId id="262" r:id="rId8"/>
     <p:sldId id="263" r:id="rId9"/>
+    <p:sldId id="264" r:id="rId10"/>
+    <p:sldId id="265" r:id="rId11"/>
+    <p:sldId id="266" r:id="rId12"/>
+    <p:sldId id="267" r:id="rId13"/>
   </p:sldIdLst>
   <p:sldSz cx="12192000" cy="6858000"/>
   <p:notesSz cx="6858000" cy="9144000"/>
@@ -3421,6 +3425,276 @@
 </p:sld>
 </file>
 
+<file path=ppt/slides/slide10.xml><?xml version="1.0" encoding="utf-8"?>
+<p:sld xmlns:a="http://schemas.openxmlformats.org/drawingml/2006/main" xmlns:r="http://schemas.openxmlformats.org/officeDocument/2006/relationships" xmlns:p="http://schemas.openxmlformats.org/presentationml/2006/main">
+  <p:cSld>
+    <p:spTree>
+      <p:nvGrpSpPr>
+        <p:cNvPr id="1" name=""/>
+        <p:cNvGrpSpPr/>
+        <p:nvPr/>
+      </p:nvGrpSpPr>
+      <p:grpSpPr>
+        <a:xfrm>
+          <a:off x="0" y="0"/>
+          <a:ext cx="0" cy="0"/>
+          <a:chOff x="0" y="0"/>
+          <a:chExt cx="0" cy="0"/>
+        </a:xfrm>
+      </p:grpSpPr>
+      <p:sp>
+        <p:nvSpPr>
+          <p:cNvPr id="2" name="제목 1">
+            <a:extLst>
+              <a:ext uri="{FF2B5EF4-FFF2-40B4-BE49-F238E27FC236}">
+                <a16:creationId xmlns:a16="http://schemas.microsoft.com/office/drawing/2014/main" id="{3188E5EA-3E8E-511E-CBEC-7B32059AB60B}"/>
+              </a:ext>
+            </a:extLst>
+          </p:cNvPr>
+          <p:cNvSpPr>
+            <a:spLocks noGrp="1"/>
+          </p:cNvSpPr>
+          <p:nvPr>
+            <p:ph type="title"/>
+          </p:nvPr>
+        </p:nvSpPr>
+        <p:spPr/>
+        <p:txBody>
+          <a:bodyPr/>
+          <a:lstStyle/>
+          <a:p>
+            <a:endParaRPr lang="ko-KR" altLang="en-US"/>
+          </a:p>
+        </p:txBody>
+      </p:sp>
+      <p:pic>
+        <p:nvPicPr>
+          <p:cNvPr id="5" name="내용 개체 틀 4" descr="텍스트, 스크린샷, 멀티미디어 소프트웨어, 그래픽 소프트웨어이(가) 표시된 사진&#10;&#10;AI가 생성한 콘텐츠는 부정확할 수 있습니다.">
+            <a:extLst>
+              <a:ext uri="{FF2B5EF4-FFF2-40B4-BE49-F238E27FC236}">
+                <a16:creationId xmlns:a16="http://schemas.microsoft.com/office/drawing/2014/main" id="{D57C66F4-49CE-961B-633A-8CC6BDA2C6CF}"/>
+              </a:ext>
+            </a:extLst>
+          </p:cNvPr>
+          <p:cNvPicPr>
+            <a:picLocks noGrp="1" noChangeAspect="1"/>
+          </p:cNvPicPr>
+          <p:nvPr>
+            <p:ph idx="1"/>
+          </p:nvPr>
+        </p:nvPicPr>
+        <p:blipFill>
+          <a:blip r:embed="rId2">
+            <a:extLst>
+              <a:ext uri="{28A0092B-C50C-407E-A947-70E740481C1C}">
+                <a14:useLocalDpi xmlns:a14="http://schemas.microsoft.com/office/drawing/2010/main" val="0"/>
+              </a:ext>
+            </a:extLst>
+          </a:blip>
+          <a:stretch>
+            <a:fillRect/>
+          </a:stretch>
+        </p:blipFill>
+        <p:spPr>
+          <a:xfrm>
+            <a:off x="-210306" y="-115470"/>
+            <a:ext cx="12402306" cy="6973470"/>
+          </a:xfrm>
+        </p:spPr>
+      </p:pic>
+    </p:spTree>
+    <p:extLst>
+      <p:ext uri="{BB962C8B-B14F-4D97-AF65-F5344CB8AC3E}">
+        <p14:creationId xmlns:p14="http://schemas.microsoft.com/office/powerpoint/2010/main" val="1700064708"/>
+      </p:ext>
+    </p:extLst>
+  </p:cSld>
+  <p:clrMapOvr>
+    <a:masterClrMapping/>
+  </p:clrMapOvr>
+</p:sld>
+</file>
+
+<file path=ppt/slides/slide11.xml><?xml version="1.0" encoding="utf-8"?>
+<p:sld xmlns:a="http://schemas.openxmlformats.org/drawingml/2006/main" xmlns:r="http://schemas.openxmlformats.org/officeDocument/2006/relationships" xmlns:p="http://schemas.openxmlformats.org/presentationml/2006/main">
+  <p:cSld>
+    <p:spTree>
+      <p:nvGrpSpPr>
+        <p:cNvPr id="1" name=""/>
+        <p:cNvGrpSpPr/>
+        <p:nvPr/>
+      </p:nvGrpSpPr>
+      <p:grpSpPr>
+        <a:xfrm>
+          <a:off x="0" y="0"/>
+          <a:ext cx="0" cy="0"/>
+          <a:chOff x="0" y="0"/>
+          <a:chExt cx="0" cy="0"/>
+        </a:xfrm>
+      </p:grpSpPr>
+      <p:sp>
+        <p:nvSpPr>
+          <p:cNvPr id="2" name="제목 1">
+            <a:extLst>
+              <a:ext uri="{FF2B5EF4-FFF2-40B4-BE49-F238E27FC236}">
+                <a16:creationId xmlns:a16="http://schemas.microsoft.com/office/drawing/2014/main" id="{4213382A-51F4-573F-3647-2BC8AD7247A8}"/>
+              </a:ext>
+            </a:extLst>
+          </p:cNvPr>
+          <p:cNvSpPr>
+            <a:spLocks noGrp="1"/>
+          </p:cNvSpPr>
+          <p:nvPr>
+            <p:ph type="title"/>
+          </p:nvPr>
+        </p:nvSpPr>
+        <p:spPr/>
+        <p:txBody>
+          <a:bodyPr/>
+          <a:lstStyle/>
+          <a:p>
+            <a:endParaRPr lang="ko-KR" altLang="en-US"/>
+          </a:p>
+        </p:txBody>
+      </p:sp>
+      <p:pic>
+        <p:nvPicPr>
+          <p:cNvPr id="5" name="내용 개체 틀 4" descr="스크린샷, 텍스트, 멀티미디어 소프트웨어, 그래픽 소프트웨어이(가) 표시된 사진&#10;&#10;AI가 생성한 콘텐츠는 부정확할 수 있습니다.">
+            <a:extLst>
+              <a:ext uri="{FF2B5EF4-FFF2-40B4-BE49-F238E27FC236}">
+                <a16:creationId xmlns:a16="http://schemas.microsoft.com/office/drawing/2014/main" id="{24BDFD98-A6E3-E6D2-26F1-5F68D15DC0FA}"/>
+              </a:ext>
+            </a:extLst>
+          </p:cNvPr>
+          <p:cNvPicPr>
+            <a:picLocks noGrp="1" noChangeAspect="1"/>
+          </p:cNvPicPr>
+          <p:nvPr>
+            <p:ph idx="1"/>
+          </p:nvPr>
+        </p:nvPicPr>
+        <p:blipFill>
+          <a:blip r:embed="rId2">
+            <a:extLst>
+              <a:ext uri="{28A0092B-C50C-407E-A947-70E740481C1C}">
+                <a14:useLocalDpi xmlns:a14="http://schemas.microsoft.com/office/drawing/2010/main" val="0"/>
+              </a:ext>
+            </a:extLst>
+          </a:blip>
+          <a:stretch>
+            <a:fillRect/>
+          </a:stretch>
+        </p:blipFill>
+        <p:spPr>
+          <a:xfrm>
+            <a:off x="-1" y="0"/>
+            <a:ext cx="12196943" cy="6858000"/>
+          </a:xfrm>
+        </p:spPr>
+      </p:pic>
+    </p:spTree>
+    <p:extLst>
+      <p:ext uri="{BB962C8B-B14F-4D97-AF65-F5344CB8AC3E}">
+        <p14:creationId xmlns:p14="http://schemas.microsoft.com/office/powerpoint/2010/main" val="1050581713"/>
+      </p:ext>
+    </p:extLst>
+  </p:cSld>
+  <p:clrMapOvr>
+    <a:masterClrMapping/>
+  </p:clrMapOvr>
+</p:sld>
+</file>
+
+<file path=ppt/slides/slide12.xml><?xml version="1.0" encoding="utf-8"?>
+<p:sld xmlns:a="http://schemas.openxmlformats.org/drawingml/2006/main" xmlns:r="http://schemas.openxmlformats.org/officeDocument/2006/relationships" xmlns:p="http://schemas.openxmlformats.org/presentationml/2006/main">
+  <p:cSld>
+    <p:spTree>
+      <p:nvGrpSpPr>
+        <p:cNvPr id="1" name=""/>
+        <p:cNvGrpSpPr/>
+        <p:nvPr/>
+      </p:nvGrpSpPr>
+      <p:grpSpPr>
+        <a:xfrm>
+          <a:off x="0" y="0"/>
+          <a:ext cx="0" cy="0"/>
+          <a:chOff x="0" y="0"/>
+          <a:chExt cx="0" cy="0"/>
+        </a:xfrm>
+      </p:grpSpPr>
+      <p:sp>
+        <p:nvSpPr>
+          <p:cNvPr id="2" name="제목 1">
+            <a:extLst>
+              <a:ext uri="{FF2B5EF4-FFF2-40B4-BE49-F238E27FC236}">
+                <a16:creationId xmlns:a16="http://schemas.microsoft.com/office/drawing/2014/main" id="{CF145A2C-71AF-B921-9CF4-C23A04EC0073}"/>
+              </a:ext>
+            </a:extLst>
+          </p:cNvPr>
+          <p:cNvSpPr>
+            <a:spLocks noGrp="1"/>
+          </p:cNvSpPr>
+          <p:nvPr>
+            <p:ph type="title"/>
+          </p:nvPr>
+        </p:nvSpPr>
+        <p:spPr/>
+        <p:txBody>
+          <a:bodyPr/>
+          <a:lstStyle/>
+          <a:p>
+            <a:endParaRPr lang="ko-KR" altLang="en-US"/>
+          </a:p>
+        </p:txBody>
+      </p:sp>
+      <p:pic>
+        <p:nvPicPr>
+          <p:cNvPr id="5" name="내용 개체 틀 4" descr="스크린샷, 텍스트, 멀티미디어 소프트웨어, 소프트웨어이(가) 표시된 사진&#10;&#10;AI가 생성한 콘텐츠는 부정확할 수 있습니다.">
+            <a:extLst>
+              <a:ext uri="{FF2B5EF4-FFF2-40B4-BE49-F238E27FC236}">
+                <a16:creationId xmlns:a16="http://schemas.microsoft.com/office/drawing/2014/main" id="{83719A38-76C8-7337-4C8A-083171D37597}"/>
+              </a:ext>
+            </a:extLst>
+          </p:cNvPr>
+          <p:cNvPicPr>
+            <a:picLocks noGrp="1" noChangeAspect="1"/>
+          </p:cNvPicPr>
+          <p:nvPr>
+            <p:ph idx="1"/>
+          </p:nvPr>
+        </p:nvPicPr>
+        <p:blipFill>
+          <a:blip r:embed="rId2">
+            <a:extLst>
+              <a:ext uri="{28A0092B-C50C-407E-A947-70E740481C1C}">
+                <a14:useLocalDpi xmlns:a14="http://schemas.microsoft.com/office/drawing/2010/main" val="0"/>
+              </a:ext>
+            </a:extLst>
+          </a:blip>
+          <a:stretch>
+            <a:fillRect/>
+          </a:stretch>
+        </p:blipFill>
+        <p:spPr>
+          <a:xfrm>
+            <a:off x="-1" y="0"/>
+            <a:ext cx="12196943" cy="6858000"/>
+          </a:xfrm>
+        </p:spPr>
+      </p:pic>
+    </p:spTree>
+    <p:extLst>
+      <p:ext uri="{BB962C8B-B14F-4D97-AF65-F5344CB8AC3E}">
+        <p14:creationId xmlns:p14="http://schemas.microsoft.com/office/powerpoint/2010/main" val="958519600"/>
+      </p:ext>
+    </p:extLst>
+  </p:cSld>
+  <p:clrMapOvr>
+    <a:masterClrMapping/>
+  </p:clrMapOvr>
+</p:sld>
+</file>
+
 <file path=ppt/slides/slide2.xml><?xml version="1.0" encoding="utf-8"?>
 <p:sld xmlns:a="http://schemas.openxmlformats.org/drawingml/2006/main" xmlns:r="http://schemas.openxmlformats.org/officeDocument/2006/relationships" xmlns:p="http://schemas.openxmlformats.org/presentationml/2006/main">
   <p:cSld>
@@ -4178,10 +4452,166 @@
           </a:prstGeom>
         </p:spPr>
       </p:pic>
+      <p:pic>
+        <p:nvPicPr>
+          <p:cNvPr id="7" name="그림 6">
+            <a:extLst>
+              <a:ext uri="{FF2B5EF4-FFF2-40B4-BE49-F238E27FC236}">
+                <a16:creationId xmlns:a16="http://schemas.microsoft.com/office/drawing/2014/main" id="{9A0A2AF4-8405-44A9-E2B7-E23CE7D367E1}"/>
+              </a:ext>
+            </a:extLst>
+          </p:cNvPr>
+          <p:cNvPicPr>
+            <a:picLocks noChangeAspect="1"/>
+          </p:cNvPicPr>
+          <p:nvPr/>
+        </p:nvPicPr>
+        <p:blipFill>
+          <a:blip r:embed="rId3"/>
+          <a:stretch>
+            <a:fillRect/>
+          </a:stretch>
+        </p:blipFill>
+        <p:spPr>
+          <a:xfrm>
+            <a:off x="0" y="1390"/>
+            <a:ext cx="12192000" cy="6855220"/>
+          </a:xfrm>
+          <a:prstGeom prst="rect">
+            <a:avLst/>
+          </a:prstGeom>
+        </p:spPr>
+      </p:pic>
+      <p:pic>
+        <p:nvPicPr>
+          <p:cNvPr id="9" name="그림 8" descr="평면도, 도표, 지도, 기술 도면이(가) 표시된 사진&#10;&#10;AI가 생성한 콘텐츠는 부정확할 수 있습니다.">
+            <a:extLst>
+              <a:ext uri="{FF2B5EF4-FFF2-40B4-BE49-F238E27FC236}">
+                <a16:creationId xmlns:a16="http://schemas.microsoft.com/office/drawing/2014/main" id="{7DDC8C28-CF6B-9F44-6D46-155578D2F602}"/>
+              </a:ext>
+            </a:extLst>
+          </p:cNvPr>
+          <p:cNvPicPr>
+            <a:picLocks noChangeAspect="1"/>
+          </p:cNvPicPr>
+          <p:nvPr/>
+        </p:nvPicPr>
+        <p:blipFill>
+          <a:blip r:embed="rId4">
+            <a:extLst>
+              <a:ext uri="{28A0092B-C50C-407E-A947-70E740481C1C}">
+                <a14:useLocalDpi xmlns:a14="http://schemas.microsoft.com/office/drawing/2010/main" val="0"/>
+              </a:ext>
+            </a:extLst>
+          </a:blip>
+          <a:stretch>
+            <a:fillRect/>
+          </a:stretch>
+        </p:blipFill>
+        <p:spPr>
+          <a:xfrm>
+            <a:off x="689808" y="51916"/>
+            <a:ext cx="10812384" cy="6754168"/>
+          </a:xfrm>
+          <a:prstGeom prst="rect">
+            <a:avLst/>
+          </a:prstGeom>
+        </p:spPr>
+      </p:pic>
     </p:spTree>
     <p:extLst>
       <p:ext uri="{BB962C8B-B14F-4D97-AF65-F5344CB8AC3E}">
         <p14:creationId xmlns:p14="http://schemas.microsoft.com/office/powerpoint/2010/main" val="14381278"/>
+      </p:ext>
+    </p:extLst>
+  </p:cSld>
+  <p:clrMapOvr>
+    <a:masterClrMapping/>
+  </p:clrMapOvr>
+</p:sld>
+</file>
+
+<file path=ppt/slides/slide9.xml><?xml version="1.0" encoding="utf-8"?>
+<p:sld xmlns:a="http://schemas.openxmlformats.org/drawingml/2006/main" xmlns:r="http://schemas.openxmlformats.org/officeDocument/2006/relationships" xmlns:p="http://schemas.openxmlformats.org/presentationml/2006/main">
+  <p:cSld>
+    <p:spTree>
+      <p:nvGrpSpPr>
+        <p:cNvPr id="1" name=""/>
+        <p:cNvGrpSpPr/>
+        <p:nvPr/>
+      </p:nvGrpSpPr>
+      <p:grpSpPr>
+        <a:xfrm>
+          <a:off x="0" y="0"/>
+          <a:ext cx="0" cy="0"/>
+          <a:chOff x="0" y="0"/>
+          <a:chExt cx="0" cy="0"/>
+        </a:xfrm>
+      </p:grpSpPr>
+      <p:sp>
+        <p:nvSpPr>
+          <p:cNvPr id="2" name="제목 1">
+            <a:extLst>
+              <a:ext uri="{FF2B5EF4-FFF2-40B4-BE49-F238E27FC236}">
+                <a16:creationId xmlns:a16="http://schemas.microsoft.com/office/drawing/2014/main" id="{F7DAE5E1-2925-E895-BE8A-8AB11A83C126}"/>
+              </a:ext>
+            </a:extLst>
+          </p:cNvPr>
+          <p:cNvSpPr>
+            <a:spLocks noGrp="1"/>
+          </p:cNvSpPr>
+          <p:nvPr>
+            <p:ph type="title"/>
+          </p:nvPr>
+        </p:nvSpPr>
+        <p:spPr/>
+        <p:txBody>
+          <a:bodyPr/>
+          <a:lstStyle/>
+          <a:p>
+            <a:endParaRPr lang="ko-KR" altLang="en-US"/>
+          </a:p>
+        </p:txBody>
+      </p:sp>
+      <p:pic>
+        <p:nvPicPr>
+          <p:cNvPr id="5" name="내용 개체 틀 4" descr="스크린샷, 텍스트, 멀티미디어 소프트웨어, 소프트웨어이(가) 표시된 사진&#10;&#10;AI가 생성한 콘텐츠는 부정확할 수 있습니다.">
+            <a:extLst>
+              <a:ext uri="{FF2B5EF4-FFF2-40B4-BE49-F238E27FC236}">
+                <a16:creationId xmlns:a16="http://schemas.microsoft.com/office/drawing/2014/main" id="{E9F12C09-68C9-A6E0-DF19-181270520C20}"/>
+              </a:ext>
+            </a:extLst>
+          </p:cNvPr>
+          <p:cNvPicPr>
+            <a:picLocks noGrp="1" noChangeAspect="1"/>
+          </p:cNvPicPr>
+          <p:nvPr>
+            <p:ph idx="1"/>
+          </p:nvPr>
+        </p:nvPicPr>
+        <p:blipFill>
+          <a:blip r:embed="rId2">
+            <a:extLst>
+              <a:ext uri="{28A0092B-C50C-407E-A947-70E740481C1C}">
+                <a14:useLocalDpi xmlns:a14="http://schemas.microsoft.com/office/drawing/2010/main" val="0"/>
+              </a:ext>
+            </a:extLst>
+          </a:blip>
+          <a:stretch>
+            <a:fillRect/>
+          </a:stretch>
+        </p:blipFill>
+        <p:spPr>
+          <a:xfrm>
+            <a:off x="-1" y="0"/>
+            <a:ext cx="12196943" cy="6858000"/>
+          </a:xfrm>
+        </p:spPr>
+      </p:pic>
+    </p:spTree>
+    <p:extLst>
+      <p:ext uri="{BB962C8B-B14F-4D97-AF65-F5344CB8AC3E}">
+        <p14:creationId xmlns:p14="http://schemas.microsoft.com/office/powerpoint/2010/main" val="3351646954"/>
       </p:ext>
     </p:extLst>
   </p:cSld>

--- a/20263600김준성.pptx
+++ b/20263600김준성.pptx
@@ -13,10 +13,6 @@
     <p:sldId id="261" r:id="rId7"/>
     <p:sldId id="262" r:id="rId8"/>
     <p:sldId id="263" r:id="rId9"/>
-    <p:sldId id="264" r:id="rId10"/>
-    <p:sldId id="265" r:id="rId11"/>
-    <p:sldId id="266" r:id="rId12"/>
-    <p:sldId id="267" r:id="rId13"/>
   </p:sldIdLst>
   <p:sldSz cx="12192000" cy="6858000"/>
   <p:notesSz cx="6858000" cy="9144000"/>
@@ -3425,276 +3421,6 @@
 </p:sld>
 </file>
 
-<file path=ppt/slides/slide10.xml><?xml version="1.0" encoding="utf-8"?>
-<p:sld xmlns:a="http://schemas.openxmlformats.org/drawingml/2006/main" xmlns:r="http://schemas.openxmlformats.org/officeDocument/2006/relationships" xmlns:p="http://schemas.openxmlformats.org/presentationml/2006/main">
-  <p:cSld>
-    <p:spTree>
-      <p:nvGrpSpPr>
-        <p:cNvPr id="1" name=""/>
-        <p:cNvGrpSpPr/>
-        <p:nvPr/>
-      </p:nvGrpSpPr>
-      <p:grpSpPr>
-        <a:xfrm>
-          <a:off x="0" y="0"/>
-          <a:ext cx="0" cy="0"/>
-          <a:chOff x="0" y="0"/>
-          <a:chExt cx="0" cy="0"/>
-        </a:xfrm>
-      </p:grpSpPr>
-      <p:sp>
-        <p:nvSpPr>
-          <p:cNvPr id="2" name="제목 1">
-            <a:extLst>
-              <a:ext uri="{FF2B5EF4-FFF2-40B4-BE49-F238E27FC236}">
-                <a16:creationId xmlns:a16="http://schemas.microsoft.com/office/drawing/2014/main" id="{3188E5EA-3E8E-511E-CBEC-7B32059AB60B}"/>
-              </a:ext>
-            </a:extLst>
-          </p:cNvPr>
-          <p:cNvSpPr>
-            <a:spLocks noGrp="1"/>
-          </p:cNvSpPr>
-          <p:nvPr>
-            <p:ph type="title"/>
-          </p:nvPr>
-        </p:nvSpPr>
-        <p:spPr/>
-        <p:txBody>
-          <a:bodyPr/>
-          <a:lstStyle/>
-          <a:p>
-            <a:endParaRPr lang="ko-KR" altLang="en-US"/>
-          </a:p>
-        </p:txBody>
-      </p:sp>
-      <p:pic>
-        <p:nvPicPr>
-          <p:cNvPr id="5" name="내용 개체 틀 4" descr="텍스트, 스크린샷, 멀티미디어 소프트웨어, 그래픽 소프트웨어이(가) 표시된 사진&#10;&#10;AI가 생성한 콘텐츠는 부정확할 수 있습니다.">
-            <a:extLst>
-              <a:ext uri="{FF2B5EF4-FFF2-40B4-BE49-F238E27FC236}">
-                <a16:creationId xmlns:a16="http://schemas.microsoft.com/office/drawing/2014/main" id="{D57C66F4-49CE-961B-633A-8CC6BDA2C6CF}"/>
-              </a:ext>
-            </a:extLst>
-          </p:cNvPr>
-          <p:cNvPicPr>
-            <a:picLocks noGrp="1" noChangeAspect="1"/>
-          </p:cNvPicPr>
-          <p:nvPr>
-            <p:ph idx="1"/>
-          </p:nvPr>
-        </p:nvPicPr>
-        <p:blipFill>
-          <a:blip r:embed="rId2">
-            <a:extLst>
-              <a:ext uri="{28A0092B-C50C-407E-A947-70E740481C1C}">
-                <a14:useLocalDpi xmlns:a14="http://schemas.microsoft.com/office/drawing/2010/main" val="0"/>
-              </a:ext>
-            </a:extLst>
-          </a:blip>
-          <a:stretch>
-            <a:fillRect/>
-          </a:stretch>
-        </p:blipFill>
-        <p:spPr>
-          <a:xfrm>
-            <a:off x="-210306" y="-115470"/>
-            <a:ext cx="12402306" cy="6973470"/>
-          </a:xfrm>
-        </p:spPr>
-      </p:pic>
-    </p:spTree>
-    <p:extLst>
-      <p:ext uri="{BB962C8B-B14F-4D97-AF65-F5344CB8AC3E}">
-        <p14:creationId xmlns:p14="http://schemas.microsoft.com/office/powerpoint/2010/main" val="1700064708"/>
-      </p:ext>
-    </p:extLst>
-  </p:cSld>
-  <p:clrMapOvr>
-    <a:masterClrMapping/>
-  </p:clrMapOvr>
-</p:sld>
-</file>
-
-<file path=ppt/slides/slide11.xml><?xml version="1.0" encoding="utf-8"?>
-<p:sld xmlns:a="http://schemas.openxmlformats.org/drawingml/2006/main" xmlns:r="http://schemas.openxmlformats.org/officeDocument/2006/relationships" xmlns:p="http://schemas.openxmlformats.org/presentationml/2006/main">
-  <p:cSld>
-    <p:spTree>
-      <p:nvGrpSpPr>
-        <p:cNvPr id="1" name=""/>
-        <p:cNvGrpSpPr/>
-        <p:nvPr/>
-      </p:nvGrpSpPr>
-      <p:grpSpPr>
-        <a:xfrm>
-          <a:off x="0" y="0"/>
-          <a:ext cx="0" cy="0"/>
-          <a:chOff x="0" y="0"/>
-          <a:chExt cx="0" cy="0"/>
-        </a:xfrm>
-      </p:grpSpPr>
-      <p:sp>
-        <p:nvSpPr>
-          <p:cNvPr id="2" name="제목 1">
-            <a:extLst>
-              <a:ext uri="{FF2B5EF4-FFF2-40B4-BE49-F238E27FC236}">
-                <a16:creationId xmlns:a16="http://schemas.microsoft.com/office/drawing/2014/main" id="{4213382A-51F4-573F-3647-2BC8AD7247A8}"/>
-              </a:ext>
-            </a:extLst>
-          </p:cNvPr>
-          <p:cNvSpPr>
-            <a:spLocks noGrp="1"/>
-          </p:cNvSpPr>
-          <p:nvPr>
-            <p:ph type="title"/>
-          </p:nvPr>
-        </p:nvSpPr>
-        <p:spPr/>
-        <p:txBody>
-          <a:bodyPr/>
-          <a:lstStyle/>
-          <a:p>
-            <a:endParaRPr lang="ko-KR" altLang="en-US"/>
-          </a:p>
-        </p:txBody>
-      </p:sp>
-      <p:pic>
-        <p:nvPicPr>
-          <p:cNvPr id="5" name="내용 개체 틀 4" descr="스크린샷, 텍스트, 멀티미디어 소프트웨어, 그래픽 소프트웨어이(가) 표시된 사진&#10;&#10;AI가 생성한 콘텐츠는 부정확할 수 있습니다.">
-            <a:extLst>
-              <a:ext uri="{FF2B5EF4-FFF2-40B4-BE49-F238E27FC236}">
-                <a16:creationId xmlns:a16="http://schemas.microsoft.com/office/drawing/2014/main" id="{24BDFD98-A6E3-E6D2-26F1-5F68D15DC0FA}"/>
-              </a:ext>
-            </a:extLst>
-          </p:cNvPr>
-          <p:cNvPicPr>
-            <a:picLocks noGrp="1" noChangeAspect="1"/>
-          </p:cNvPicPr>
-          <p:nvPr>
-            <p:ph idx="1"/>
-          </p:nvPr>
-        </p:nvPicPr>
-        <p:blipFill>
-          <a:blip r:embed="rId2">
-            <a:extLst>
-              <a:ext uri="{28A0092B-C50C-407E-A947-70E740481C1C}">
-                <a14:useLocalDpi xmlns:a14="http://schemas.microsoft.com/office/drawing/2010/main" val="0"/>
-              </a:ext>
-            </a:extLst>
-          </a:blip>
-          <a:stretch>
-            <a:fillRect/>
-          </a:stretch>
-        </p:blipFill>
-        <p:spPr>
-          <a:xfrm>
-            <a:off x="-1" y="0"/>
-            <a:ext cx="12196943" cy="6858000"/>
-          </a:xfrm>
-        </p:spPr>
-      </p:pic>
-    </p:spTree>
-    <p:extLst>
-      <p:ext uri="{BB962C8B-B14F-4D97-AF65-F5344CB8AC3E}">
-        <p14:creationId xmlns:p14="http://schemas.microsoft.com/office/powerpoint/2010/main" val="1050581713"/>
-      </p:ext>
-    </p:extLst>
-  </p:cSld>
-  <p:clrMapOvr>
-    <a:masterClrMapping/>
-  </p:clrMapOvr>
-</p:sld>
-</file>
-
-<file path=ppt/slides/slide12.xml><?xml version="1.0" encoding="utf-8"?>
-<p:sld xmlns:a="http://schemas.openxmlformats.org/drawingml/2006/main" xmlns:r="http://schemas.openxmlformats.org/officeDocument/2006/relationships" xmlns:p="http://schemas.openxmlformats.org/presentationml/2006/main">
-  <p:cSld>
-    <p:spTree>
-      <p:nvGrpSpPr>
-        <p:cNvPr id="1" name=""/>
-        <p:cNvGrpSpPr/>
-        <p:nvPr/>
-      </p:nvGrpSpPr>
-      <p:grpSpPr>
-        <a:xfrm>
-          <a:off x="0" y="0"/>
-          <a:ext cx="0" cy="0"/>
-          <a:chOff x="0" y="0"/>
-          <a:chExt cx="0" cy="0"/>
-        </a:xfrm>
-      </p:grpSpPr>
-      <p:sp>
-        <p:nvSpPr>
-          <p:cNvPr id="2" name="제목 1">
-            <a:extLst>
-              <a:ext uri="{FF2B5EF4-FFF2-40B4-BE49-F238E27FC236}">
-                <a16:creationId xmlns:a16="http://schemas.microsoft.com/office/drawing/2014/main" id="{CF145A2C-71AF-B921-9CF4-C23A04EC0073}"/>
-              </a:ext>
-            </a:extLst>
-          </p:cNvPr>
-          <p:cNvSpPr>
-            <a:spLocks noGrp="1"/>
-          </p:cNvSpPr>
-          <p:nvPr>
-            <p:ph type="title"/>
-          </p:nvPr>
-        </p:nvSpPr>
-        <p:spPr/>
-        <p:txBody>
-          <a:bodyPr/>
-          <a:lstStyle/>
-          <a:p>
-            <a:endParaRPr lang="ko-KR" altLang="en-US"/>
-          </a:p>
-        </p:txBody>
-      </p:sp>
-      <p:pic>
-        <p:nvPicPr>
-          <p:cNvPr id="5" name="내용 개체 틀 4" descr="스크린샷, 텍스트, 멀티미디어 소프트웨어, 소프트웨어이(가) 표시된 사진&#10;&#10;AI가 생성한 콘텐츠는 부정확할 수 있습니다.">
-            <a:extLst>
-              <a:ext uri="{FF2B5EF4-FFF2-40B4-BE49-F238E27FC236}">
-                <a16:creationId xmlns:a16="http://schemas.microsoft.com/office/drawing/2014/main" id="{83719A38-76C8-7337-4C8A-083171D37597}"/>
-              </a:ext>
-            </a:extLst>
-          </p:cNvPr>
-          <p:cNvPicPr>
-            <a:picLocks noGrp="1" noChangeAspect="1"/>
-          </p:cNvPicPr>
-          <p:nvPr>
-            <p:ph idx="1"/>
-          </p:nvPr>
-        </p:nvPicPr>
-        <p:blipFill>
-          <a:blip r:embed="rId2">
-            <a:extLst>
-              <a:ext uri="{28A0092B-C50C-407E-A947-70E740481C1C}">
-                <a14:useLocalDpi xmlns:a14="http://schemas.microsoft.com/office/drawing/2010/main" val="0"/>
-              </a:ext>
-            </a:extLst>
-          </a:blip>
-          <a:stretch>
-            <a:fillRect/>
-          </a:stretch>
-        </p:blipFill>
-        <p:spPr>
-          <a:xfrm>
-            <a:off x="-1" y="0"/>
-            <a:ext cx="12196943" cy="6858000"/>
-          </a:xfrm>
-        </p:spPr>
-      </p:pic>
-    </p:spTree>
-    <p:extLst>
-      <p:ext uri="{BB962C8B-B14F-4D97-AF65-F5344CB8AC3E}">
-        <p14:creationId xmlns:p14="http://schemas.microsoft.com/office/powerpoint/2010/main" val="958519600"/>
-      </p:ext>
-    </p:extLst>
-  </p:cSld>
-  <p:clrMapOvr>
-    <a:masterClrMapping/>
-  </p:clrMapOvr>
-</p:sld>
-</file>
-
 <file path=ppt/slides/slide2.xml><?xml version="1.0" encoding="utf-8"?>
 <p:sld xmlns:a="http://schemas.openxmlformats.org/drawingml/2006/main" xmlns:r="http://schemas.openxmlformats.org/officeDocument/2006/relationships" xmlns:p="http://schemas.openxmlformats.org/presentationml/2006/main">
   <p:cSld>
@@ -4452,166 +4178,10 @@
           </a:prstGeom>
         </p:spPr>
       </p:pic>
-      <p:pic>
-        <p:nvPicPr>
-          <p:cNvPr id="7" name="그림 6">
-            <a:extLst>
-              <a:ext uri="{FF2B5EF4-FFF2-40B4-BE49-F238E27FC236}">
-                <a16:creationId xmlns:a16="http://schemas.microsoft.com/office/drawing/2014/main" id="{9A0A2AF4-8405-44A9-E2B7-E23CE7D367E1}"/>
-              </a:ext>
-            </a:extLst>
-          </p:cNvPr>
-          <p:cNvPicPr>
-            <a:picLocks noChangeAspect="1"/>
-          </p:cNvPicPr>
-          <p:nvPr/>
-        </p:nvPicPr>
-        <p:blipFill>
-          <a:blip r:embed="rId3"/>
-          <a:stretch>
-            <a:fillRect/>
-          </a:stretch>
-        </p:blipFill>
-        <p:spPr>
-          <a:xfrm>
-            <a:off x="0" y="1390"/>
-            <a:ext cx="12192000" cy="6855220"/>
-          </a:xfrm>
-          <a:prstGeom prst="rect">
-            <a:avLst/>
-          </a:prstGeom>
-        </p:spPr>
-      </p:pic>
-      <p:pic>
-        <p:nvPicPr>
-          <p:cNvPr id="9" name="그림 8" descr="평면도, 도표, 지도, 기술 도면이(가) 표시된 사진&#10;&#10;AI가 생성한 콘텐츠는 부정확할 수 있습니다.">
-            <a:extLst>
-              <a:ext uri="{FF2B5EF4-FFF2-40B4-BE49-F238E27FC236}">
-                <a16:creationId xmlns:a16="http://schemas.microsoft.com/office/drawing/2014/main" id="{7DDC8C28-CF6B-9F44-6D46-155578D2F602}"/>
-              </a:ext>
-            </a:extLst>
-          </p:cNvPr>
-          <p:cNvPicPr>
-            <a:picLocks noChangeAspect="1"/>
-          </p:cNvPicPr>
-          <p:nvPr/>
-        </p:nvPicPr>
-        <p:blipFill>
-          <a:blip r:embed="rId4">
-            <a:extLst>
-              <a:ext uri="{28A0092B-C50C-407E-A947-70E740481C1C}">
-                <a14:useLocalDpi xmlns:a14="http://schemas.microsoft.com/office/drawing/2010/main" val="0"/>
-              </a:ext>
-            </a:extLst>
-          </a:blip>
-          <a:stretch>
-            <a:fillRect/>
-          </a:stretch>
-        </p:blipFill>
-        <p:spPr>
-          <a:xfrm>
-            <a:off x="689808" y="51916"/>
-            <a:ext cx="10812384" cy="6754168"/>
-          </a:xfrm>
-          <a:prstGeom prst="rect">
-            <a:avLst/>
-          </a:prstGeom>
-        </p:spPr>
-      </p:pic>
     </p:spTree>
     <p:extLst>
       <p:ext uri="{BB962C8B-B14F-4D97-AF65-F5344CB8AC3E}">
         <p14:creationId xmlns:p14="http://schemas.microsoft.com/office/powerpoint/2010/main" val="14381278"/>
-      </p:ext>
-    </p:extLst>
-  </p:cSld>
-  <p:clrMapOvr>
-    <a:masterClrMapping/>
-  </p:clrMapOvr>
-</p:sld>
-</file>
-
-<file path=ppt/slides/slide9.xml><?xml version="1.0" encoding="utf-8"?>
-<p:sld xmlns:a="http://schemas.openxmlformats.org/drawingml/2006/main" xmlns:r="http://schemas.openxmlformats.org/officeDocument/2006/relationships" xmlns:p="http://schemas.openxmlformats.org/presentationml/2006/main">
-  <p:cSld>
-    <p:spTree>
-      <p:nvGrpSpPr>
-        <p:cNvPr id="1" name=""/>
-        <p:cNvGrpSpPr/>
-        <p:nvPr/>
-      </p:nvGrpSpPr>
-      <p:grpSpPr>
-        <a:xfrm>
-          <a:off x="0" y="0"/>
-          <a:ext cx="0" cy="0"/>
-          <a:chOff x="0" y="0"/>
-          <a:chExt cx="0" cy="0"/>
-        </a:xfrm>
-      </p:grpSpPr>
-      <p:sp>
-        <p:nvSpPr>
-          <p:cNvPr id="2" name="제목 1">
-            <a:extLst>
-              <a:ext uri="{FF2B5EF4-FFF2-40B4-BE49-F238E27FC236}">
-                <a16:creationId xmlns:a16="http://schemas.microsoft.com/office/drawing/2014/main" id="{F7DAE5E1-2925-E895-BE8A-8AB11A83C126}"/>
-              </a:ext>
-            </a:extLst>
-          </p:cNvPr>
-          <p:cNvSpPr>
-            <a:spLocks noGrp="1"/>
-          </p:cNvSpPr>
-          <p:nvPr>
-            <p:ph type="title"/>
-          </p:nvPr>
-        </p:nvSpPr>
-        <p:spPr/>
-        <p:txBody>
-          <a:bodyPr/>
-          <a:lstStyle/>
-          <a:p>
-            <a:endParaRPr lang="ko-KR" altLang="en-US"/>
-          </a:p>
-        </p:txBody>
-      </p:sp>
-      <p:pic>
-        <p:nvPicPr>
-          <p:cNvPr id="5" name="내용 개체 틀 4" descr="스크린샷, 텍스트, 멀티미디어 소프트웨어, 소프트웨어이(가) 표시된 사진&#10;&#10;AI가 생성한 콘텐츠는 부정확할 수 있습니다.">
-            <a:extLst>
-              <a:ext uri="{FF2B5EF4-FFF2-40B4-BE49-F238E27FC236}">
-                <a16:creationId xmlns:a16="http://schemas.microsoft.com/office/drawing/2014/main" id="{E9F12C09-68C9-A6E0-DF19-181270520C20}"/>
-              </a:ext>
-            </a:extLst>
-          </p:cNvPr>
-          <p:cNvPicPr>
-            <a:picLocks noGrp="1" noChangeAspect="1"/>
-          </p:cNvPicPr>
-          <p:nvPr>
-            <p:ph idx="1"/>
-          </p:nvPr>
-        </p:nvPicPr>
-        <p:blipFill>
-          <a:blip r:embed="rId2">
-            <a:extLst>
-              <a:ext uri="{28A0092B-C50C-407E-A947-70E740481C1C}">
-                <a14:useLocalDpi xmlns:a14="http://schemas.microsoft.com/office/drawing/2010/main" val="0"/>
-              </a:ext>
-            </a:extLst>
-          </a:blip>
-          <a:stretch>
-            <a:fillRect/>
-          </a:stretch>
-        </p:blipFill>
-        <p:spPr>
-          <a:xfrm>
-            <a:off x="-1" y="0"/>
-            <a:ext cx="12196943" cy="6858000"/>
-          </a:xfrm>
-        </p:spPr>
-      </p:pic>
-    </p:spTree>
-    <p:extLst>
-      <p:ext uri="{BB962C8B-B14F-4D97-AF65-F5344CB8AC3E}">
-        <p14:creationId xmlns:p14="http://schemas.microsoft.com/office/powerpoint/2010/main" val="3351646954"/>
       </p:ext>
     </p:extLst>
   </p:cSld>
